--- a/make_presentation/templates/templates/premium/no_logo_9.pptx
+++ b/make_presentation/templates/templates/premium/no_logo_9.pptx
@@ -118,7 +118,13 @@
               <a:rPr b="0" lang="en-US" sz="2000" spc="-1" strike="noStrike">
                 <a:latin typeface="Arial"/>
               </a:rPr>
-              <a:t>Click to edit the notes format</a:t>
+              <a:t>Click to edit the notes </a:t>
+            </a:r>
+            <a:r>
+              <a:rPr b="0" lang="en-US" sz="2000" spc="-1" strike="noStrike">
+                <a:latin typeface="Arial"/>
+              </a:rPr>
+              <a:t>format</a:t>
             </a:r>
             <a:endParaRPr b="0" lang="en-US" sz="2000" spc="-1" strike="noStrike">
               <a:latin typeface="Arial"/>
@@ -303,7 +309,7 @@
             <a:pPr algn="r">
               <a:buNone/>
             </a:pPr>
-            <a:fld id="{F218E5B3-0753-4F7E-89FF-2AF80FC76D9B}" type="slidenum">
+            <a:fld id="{CDF67C87-38F9-40C6-BBAE-7563DDD3EE95}" type="slidenum">
               <a:rPr b="0" lang="en-US" sz="1400" spc="-1" strike="noStrike">
                 <a:latin typeface="Times New Roman"/>
               </a:rPr>
@@ -340,7 +346,7 @@
       </p:grpSpPr>
       <p:sp>
         <p:nvSpPr>
-          <p:cNvPr id="137" name="PlaceHolder 1"/>
+          <p:cNvPr id="135" name="PlaceHolder 1"/>
           <p:cNvSpPr>
             <a:spLocks noGrp="1"/>
           </p:cNvSpPr>
@@ -363,7 +369,7 @@
       </p:sp>
       <p:sp>
         <p:nvSpPr>
-          <p:cNvPr id="138" name="PlaceHolder 2"/>
+          <p:cNvPr id="136" name="PlaceHolder 2"/>
           <p:cNvSpPr>
             <a:spLocks noGrp="1"/>
           </p:cNvSpPr>
@@ -397,7 +403,7 @@
       </p:sp>
       <p:sp>
         <p:nvSpPr>
-          <p:cNvPr id="139" name="PlaceHolder 3"/>
+          <p:cNvPr id="137" name="PlaceHolder 3"/>
           <p:cNvSpPr>
             <a:spLocks noGrp="1"/>
           </p:cNvSpPr>
@@ -444,7 +450,7 @@
               </a:lnSpc>
               <a:buNone/>
             </a:pPr>
-            <a:fld id="{2E7416D9-FFBB-4F79-865C-8395AB2288A2}" type="slidenum">
+            <a:fld id="{F1768942-7EEE-40DD-BDA5-48818B35B9D4}" type="slidenum">
               <a:rPr b="0" lang="en-US" sz="1800" spc="-1" strike="noStrike">
                 <a:solidFill>
                   <a:srgbClr val="000000"/>
@@ -484,7 +490,7 @@
       </p:grpSpPr>
       <p:sp>
         <p:nvSpPr>
-          <p:cNvPr id="140" name="PlaceHolder 1"/>
+          <p:cNvPr id="138" name="PlaceHolder 1"/>
           <p:cNvSpPr>
             <a:spLocks noGrp="1"/>
           </p:cNvSpPr>
@@ -507,7 +513,7 @@
       </p:sp>
       <p:sp>
         <p:nvSpPr>
-          <p:cNvPr id="141" name="PlaceHolder 2"/>
+          <p:cNvPr id="139" name="PlaceHolder 2"/>
           <p:cNvSpPr>
             <a:spLocks noGrp="1"/>
           </p:cNvSpPr>
@@ -541,7 +547,7 @@
       </p:sp>
       <p:sp>
         <p:nvSpPr>
-          <p:cNvPr id="142" name="PlaceHolder 3"/>
+          <p:cNvPr id="140" name="PlaceHolder 3"/>
           <p:cNvSpPr>
             <a:spLocks noGrp="1"/>
           </p:cNvSpPr>
@@ -588,7 +594,7 @@
               </a:lnSpc>
               <a:buNone/>
             </a:pPr>
-            <a:fld id="{330C53AA-882A-46A4-AC38-2F1ADADE052A}" type="slidenum">
+            <a:fld id="{0DAB5C59-773D-4664-AFBC-352C3FB18A0E}" type="slidenum">
               <a:rPr b="0" lang="en-US" sz="1800" spc="-1" strike="noStrike">
                 <a:solidFill>
                   <a:srgbClr val="000000"/>
@@ -628,7 +634,7 @@
       </p:grpSpPr>
       <p:sp>
         <p:nvSpPr>
-          <p:cNvPr id="143" name="PlaceHolder 1"/>
+          <p:cNvPr id="141" name="PlaceHolder 1"/>
           <p:cNvSpPr>
             <a:spLocks noGrp="1"/>
           </p:cNvSpPr>
@@ -651,7 +657,7 @@
       </p:sp>
       <p:sp>
         <p:nvSpPr>
-          <p:cNvPr id="144" name="PlaceHolder 2"/>
+          <p:cNvPr id="142" name="PlaceHolder 2"/>
           <p:cNvSpPr>
             <a:spLocks noGrp="1"/>
           </p:cNvSpPr>
@@ -685,7 +691,7 @@
       </p:sp>
       <p:sp>
         <p:nvSpPr>
-          <p:cNvPr id="145" name="PlaceHolder 3"/>
+          <p:cNvPr id="143" name="PlaceHolder 3"/>
           <p:cNvSpPr>
             <a:spLocks noGrp="1"/>
           </p:cNvSpPr>
@@ -732,7 +738,7 @@
               </a:lnSpc>
               <a:buNone/>
             </a:pPr>
-            <a:fld id="{1C3A18C0-0D41-4BD3-8980-23B5AA7F9C16}" type="slidenum">
+            <a:fld id="{5506BE76-B4E3-4177-B728-54A788D6A282}" type="slidenum">
               <a:rPr b="0" lang="en-US" sz="1800" spc="-1" strike="noStrike">
                 <a:solidFill>
                   <a:srgbClr val="000000"/>
@@ -772,7 +778,7 @@
       </p:grpSpPr>
       <p:sp>
         <p:nvSpPr>
-          <p:cNvPr id="146" name="PlaceHolder 1"/>
+          <p:cNvPr id="144" name="PlaceHolder 1"/>
           <p:cNvSpPr>
             <a:spLocks noGrp="1"/>
           </p:cNvSpPr>
@@ -795,7 +801,7 @@
       </p:sp>
       <p:sp>
         <p:nvSpPr>
-          <p:cNvPr id="147" name="PlaceHolder 2"/>
+          <p:cNvPr id="145" name="PlaceHolder 2"/>
           <p:cNvSpPr>
             <a:spLocks noGrp="1"/>
           </p:cNvSpPr>
@@ -829,7 +835,7 @@
       </p:sp>
       <p:sp>
         <p:nvSpPr>
-          <p:cNvPr id="148" name="PlaceHolder 3"/>
+          <p:cNvPr id="146" name="PlaceHolder 3"/>
           <p:cNvSpPr>
             <a:spLocks noGrp="1"/>
           </p:cNvSpPr>
@@ -876,7 +882,7 @@
               </a:lnSpc>
               <a:buNone/>
             </a:pPr>
-            <a:fld id="{C53EBFB8-1F40-44C0-8FB0-8DCFF7206C93}" type="slidenum">
+            <a:fld id="{FE94E375-4228-4E31-BD7E-1B59A480A21F}" type="slidenum">
               <a:rPr b="0" lang="en-US" sz="1800" spc="-1" strike="noStrike">
                 <a:solidFill>
                   <a:srgbClr val="000000"/>
@@ -916,7 +922,7 @@
       </p:grpSpPr>
       <p:sp>
         <p:nvSpPr>
-          <p:cNvPr id="149" name="PlaceHolder 1"/>
+          <p:cNvPr id="147" name="PlaceHolder 1"/>
           <p:cNvSpPr>
             <a:spLocks noGrp="1"/>
           </p:cNvSpPr>
@@ -939,7 +945,7 @@
       </p:sp>
       <p:sp>
         <p:nvSpPr>
-          <p:cNvPr id="150" name="PlaceHolder 2"/>
+          <p:cNvPr id="148" name="PlaceHolder 2"/>
           <p:cNvSpPr>
             <a:spLocks noGrp="1"/>
           </p:cNvSpPr>
@@ -973,7 +979,7 @@
       </p:sp>
       <p:sp>
         <p:nvSpPr>
-          <p:cNvPr id="151" name="PlaceHolder 3"/>
+          <p:cNvPr id="149" name="PlaceHolder 3"/>
           <p:cNvSpPr>
             <a:spLocks noGrp="1"/>
           </p:cNvSpPr>
@@ -1020,7 +1026,7 @@
               </a:lnSpc>
               <a:buNone/>
             </a:pPr>
-            <a:fld id="{60688C54-B27F-4E3F-A926-99A1E042D78B}" type="slidenum">
+            <a:fld id="{95746287-4A9D-4DC4-9E28-B5120132B75A}" type="slidenum">
               <a:rPr b="0" lang="en-US" sz="1800" spc="-1" strike="noStrike">
                 <a:solidFill>
                   <a:srgbClr val="000000"/>
@@ -1060,7 +1066,7 @@
       </p:grpSpPr>
       <p:sp>
         <p:nvSpPr>
-          <p:cNvPr id="152" name="PlaceHolder 1"/>
+          <p:cNvPr id="150" name="PlaceHolder 1"/>
           <p:cNvSpPr>
             <a:spLocks noGrp="1"/>
           </p:cNvSpPr>
@@ -1083,7 +1089,7 @@
       </p:sp>
       <p:sp>
         <p:nvSpPr>
-          <p:cNvPr id="153" name="PlaceHolder 2"/>
+          <p:cNvPr id="151" name="PlaceHolder 2"/>
           <p:cNvSpPr>
             <a:spLocks noGrp="1"/>
           </p:cNvSpPr>
@@ -1117,7 +1123,7 @@
       </p:sp>
       <p:sp>
         <p:nvSpPr>
-          <p:cNvPr id="154" name="PlaceHolder 3"/>
+          <p:cNvPr id="152" name="PlaceHolder 3"/>
           <p:cNvSpPr>
             <a:spLocks noGrp="1"/>
           </p:cNvSpPr>
@@ -1164,7 +1170,7 @@
               </a:lnSpc>
               <a:buNone/>
             </a:pPr>
-            <a:fld id="{05FDD8E0-256B-470E-9342-CEE7526161DC}" type="slidenum">
+            <a:fld id="{8F89A1D8-E21A-4634-82E9-777D5F7DFD0D}" type="slidenum">
               <a:rPr b="0" lang="en-US" sz="1800" spc="-1" strike="noStrike">
                 <a:solidFill>
                   <a:srgbClr val="000000"/>
@@ -1204,7 +1210,7 @@
       </p:grpSpPr>
       <p:sp>
         <p:nvSpPr>
-          <p:cNvPr id="155" name="PlaceHolder 1"/>
+          <p:cNvPr id="153" name="PlaceHolder 1"/>
           <p:cNvSpPr>
             <a:spLocks noGrp="1"/>
           </p:cNvSpPr>
@@ -1227,7 +1233,7 @@
       </p:sp>
       <p:sp>
         <p:nvSpPr>
-          <p:cNvPr id="156" name="PlaceHolder 2"/>
+          <p:cNvPr id="154" name="PlaceHolder 2"/>
           <p:cNvSpPr>
             <a:spLocks noGrp="1"/>
           </p:cNvSpPr>
@@ -1261,7 +1267,7 @@
       </p:sp>
       <p:sp>
         <p:nvSpPr>
-          <p:cNvPr id="157" name="PlaceHolder 3"/>
+          <p:cNvPr id="155" name="PlaceHolder 3"/>
           <p:cNvSpPr>
             <a:spLocks noGrp="1"/>
           </p:cNvSpPr>
@@ -1308,7 +1314,7 @@
               </a:lnSpc>
               <a:buNone/>
             </a:pPr>
-            <a:fld id="{0B761933-8A3B-4299-B8EB-1C909CE22D36}" type="slidenum">
+            <a:fld id="{5938CFB3-070A-4B25-8E0F-475868A0CD7F}" type="slidenum">
               <a:rPr b="0" lang="en-US" sz="1800" spc="-1" strike="noStrike">
                 <a:solidFill>
                   <a:srgbClr val="000000"/>
@@ -1348,7 +1354,7 @@
       </p:grpSpPr>
       <p:sp>
         <p:nvSpPr>
-          <p:cNvPr id="158" name="PlaceHolder 1"/>
+          <p:cNvPr id="156" name="PlaceHolder 1"/>
           <p:cNvSpPr>
             <a:spLocks noGrp="1"/>
           </p:cNvSpPr>
@@ -1371,7 +1377,7 @@
       </p:sp>
       <p:sp>
         <p:nvSpPr>
-          <p:cNvPr id="159" name="PlaceHolder 2"/>
+          <p:cNvPr id="157" name="PlaceHolder 2"/>
           <p:cNvSpPr>
             <a:spLocks noGrp="1"/>
           </p:cNvSpPr>
@@ -1405,7 +1411,7 @@
       </p:sp>
       <p:sp>
         <p:nvSpPr>
-          <p:cNvPr id="160" name="PlaceHolder 3"/>
+          <p:cNvPr id="158" name="PlaceHolder 3"/>
           <p:cNvSpPr>
             <a:spLocks noGrp="1"/>
           </p:cNvSpPr>
@@ -1452,7 +1458,7 @@
               </a:lnSpc>
               <a:buNone/>
             </a:pPr>
-            <a:fld id="{15F022E2-97C5-490E-BD56-60680755D5EA}" type="slidenum">
+            <a:fld id="{ED40B0D6-A3E1-4237-8CEE-EA96A70E8CD2}" type="slidenum">
               <a:rPr b="0" lang="en-US" sz="1800" spc="-1" strike="noStrike">
                 <a:solidFill>
                   <a:srgbClr val="000000"/>
@@ -1492,7 +1498,7 @@
       </p:grpSpPr>
       <p:sp>
         <p:nvSpPr>
-          <p:cNvPr id="161" name="PlaceHolder 1"/>
+          <p:cNvPr id="159" name="PlaceHolder 1"/>
           <p:cNvSpPr>
             <a:spLocks noGrp="1"/>
           </p:cNvSpPr>
@@ -1515,7 +1521,7 @@
       </p:sp>
       <p:sp>
         <p:nvSpPr>
-          <p:cNvPr id="162" name="PlaceHolder 2"/>
+          <p:cNvPr id="160" name="PlaceHolder 2"/>
           <p:cNvSpPr>
             <a:spLocks noGrp="1"/>
           </p:cNvSpPr>
@@ -1549,7 +1555,7 @@
       </p:sp>
       <p:sp>
         <p:nvSpPr>
-          <p:cNvPr id="163" name="PlaceHolder 3"/>
+          <p:cNvPr id="161" name="PlaceHolder 3"/>
           <p:cNvSpPr>
             <a:spLocks noGrp="1"/>
           </p:cNvSpPr>
@@ -1596,7 +1602,7 @@
               </a:lnSpc>
               <a:buNone/>
             </a:pPr>
-            <a:fld id="{ACA7049B-C173-4DEE-8A7D-D532182DCF44}" type="slidenum">
+            <a:fld id="{F2C96C9B-F1D3-4DF4-A00C-5F29579C6ED7}" type="slidenum">
               <a:rPr b="0" lang="en-US" sz="1800" spc="-1" strike="noStrike">
                 <a:solidFill>
                   <a:srgbClr val="000000"/>
@@ -3639,7 +3645,7 @@
         <p:spPr>
           <a:xfrm>
             <a:off x="457200" y="4027680"/>
-            <a:ext cx="10744200" cy="2030760"/>
+            <a:ext cx="10928880" cy="2030760"/>
           </a:xfrm>
           <a:prstGeom prst="rect">
             <a:avLst/>
@@ -3670,7 +3676,7 @@
               </a:tabLst>
             </a:pPr>
             <a:r>
-              <a:rPr b="1" lang="en-US" sz="4000" spc="-1" strike="noStrike">
+              <a:rPr b="1" lang="en-US" sz="4800" spc="-1" strike="noStrike">
                 <a:solidFill>
                   <a:srgbClr val="ffffff"/>
                 </a:solidFill>
@@ -3679,7 +3685,7 @@
               </a:rPr>
               <a:t>TITLE</a:t>
             </a:r>
-            <a:endParaRPr b="0" lang="en-US" sz="4000" spc="-1" strike="noStrike">
+            <a:endParaRPr b="0" lang="en-US" sz="4800" spc="-1" strike="noStrike">
               <a:latin typeface="Arial"/>
             </a:endParaRPr>
           </a:p>
@@ -6936,67 +6942,14 @@
       </p:grpSpPr>
       <p:sp>
         <p:nvSpPr>
-          <p:cNvPr id="110" name="Затемнение"/>
+          <p:cNvPr id="110" name="Чип_1"/>
           <p:cNvSpPr/>
           <p:nvPr/>
         </p:nvSpPr>
         <p:spPr>
           <a:xfrm>
-            <a:off x="0" y="1328040"/>
-            <a:ext cx="12188520" cy="5529600"/>
-          </a:xfrm>
-          <a:prstGeom prst="rect">
-            <a:avLst/>
-          </a:prstGeom>
-          <a:solidFill>
-            <a:srgbClr val="d9d9d9"/>
-          </a:solidFill>
-          <a:ln w="0">
-            <a:noFill/>
-          </a:ln>
-        </p:spPr>
-        <p:style>
-          <a:lnRef idx="0"/>
-          <a:fillRef idx="0"/>
-          <a:effectRef idx="0"/>
-          <a:fontRef idx="minor"/>
-        </p:style>
-        <p:txBody>
-          <a:bodyPr lIns="90000" rIns="90000" tIns="45000" bIns="45000" anchor="ctr">
-            <a:noAutofit/>
-          </a:bodyPr>
-          <a:p>
-            <a:pPr algn="ctr">
-              <a:lnSpc>
-                <a:spcPct val="100000"/>
-              </a:lnSpc>
-              <a:buNone/>
-            </a:pPr>
-            <a:r>
-              <a:rPr b="0" lang="en-US" sz="1800" spc="-1" strike="noStrike">
-                <a:solidFill>
-                  <a:srgbClr val="ffffff"/>
-                </a:solidFill>
-                <a:latin typeface="Calibri"/>
-              </a:rPr>
-              <a:t>PIC</a:t>
-            </a:r>
-            <a:endParaRPr b="0" lang="en-US" sz="1800" spc="-1" strike="noStrike">
-              <a:latin typeface="Arial"/>
-            </a:endParaRPr>
-          </a:p>
-        </p:txBody>
-      </p:sp>
-      <p:sp>
-        <p:nvSpPr>
-          <p:cNvPr id="111" name="Чип_1"/>
-          <p:cNvSpPr/>
-          <p:nvPr/>
-        </p:nvSpPr>
-        <p:spPr>
-          <a:xfrm>
-            <a:off x="474480" y="5290560"/>
-            <a:ext cx="4673880" cy="1255680"/>
+            <a:off x="639360" y="5290560"/>
+            <a:ext cx="5315040" cy="1255680"/>
           </a:xfrm>
           <a:prstGeom prst="roundRect">
             <a:avLst>
@@ -7024,13 +6977,13 @@
       </p:sp>
       <p:sp>
         <p:nvSpPr>
-          <p:cNvPr id="112" name="SUBTITLE 2"/>
+          <p:cNvPr id="111" name="SUBTITLE 2"/>
           <p:cNvSpPr/>
           <p:nvPr/>
         </p:nvSpPr>
         <p:spPr>
           <a:xfrm>
-            <a:off x="639360" y="5413320"/>
+            <a:off x="803880" y="5413320"/>
             <a:ext cx="4345920" cy="465480"/>
           </a:xfrm>
           <a:prstGeom prst="rect">
@@ -7079,13 +7032,13 @@
       </p:sp>
       <p:sp>
         <p:nvSpPr>
-          <p:cNvPr id="113" name="TEXT 2"/>
+          <p:cNvPr id="112" name="TEXT 2"/>
           <p:cNvSpPr/>
           <p:nvPr/>
         </p:nvSpPr>
         <p:spPr>
           <a:xfrm>
-            <a:off x="639360" y="5952240"/>
+            <a:off x="803880" y="5952240"/>
             <a:ext cx="4345920" cy="502560"/>
           </a:xfrm>
           <a:prstGeom prst="rect">
@@ -7132,94 +7085,16 @@
           </a:p>
         </p:txBody>
       </p:sp>
-      <p:pic>
-        <p:nvPicPr>
-          <p:cNvPr id="114" name="Кнопка_Навигация_Фон" descr="/home/claude/vistas/assets/grad_circle.png"/>
-          <p:cNvPicPr/>
-          <p:nvPr/>
-        </p:nvPicPr>
-        <p:blipFill>
-          <a:blip r:embed="rId1"/>
-          <a:stretch/>
-        </p:blipFill>
-        <p:spPr>
-          <a:xfrm>
-            <a:off x="11228760" y="5897880"/>
-            <a:ext cx="502560" cy="502560"/>
-          </a:xfrm>
-          <a:prstGeom prst="rect">
-            <a:avLst/>
-          </a:prstGeom>
-          <a:ln w="0">
-            <a:noFill/>
-          </a:ln>
-        </p:spPr>
-      </p:pic>
-      <p:sp>
-        <p:nvSpPr>
-          <p:cNvPr id="115" name="Кнопка_Навигация_Стрелка"/>
+      <p:sp>
+        <p:nvSpPr>
+          <p:cNvPr id="113" name="Чип_1"/>
           <p:cNvSpPr/>
           <p:nvPr/>
         </p:nvSpPr>
         <p:spPr>
           <a:xfrm>
-            <a:off x="11228760" y="5897880"/>
-            <a:ext cx="502560" cy="502560"/>
-          </a:xfrm>
-          <a:prstGeom prst="rect">
-            <a:avLst/>
-          </a:prstGeom>
-          <a:noFill/>
-          <a:ln w="0">
-            <a:noFill/>
-          </a:ln>
-        </p:spPr>
-        <p:style>
-          <a:lnRef idx="0"/>
-          <a:fillRef idx="0"/>
-          <a:effectRef idx="0"/>
-          <a:fontRef idx="minor"/>
-        </p:style>
-        <p:txBody>
-          <a:bodyPr lIns="0" rIns="0" tIns="0" bIns="0" anchor="ctr">
-            <a:noAutofit/>
-          </a:bodyPr>
-          <a:p>
-            <a:pPr algn="ctr">
-              <a:lnSpc>
-                <a:spcPct val="100000"/>
-              </a:lnSpc>
-              <a:buNone/>
-              <a:tabLst>
-                <a:tab algn="l" pos="0"/>
-              </a:tabLst>
-            </a:pPr>
-            <a:r>
-              <a:rPr b="1" lang="en-US" sz="2000" spc="-1" strike="noStrike">
-                <a:solidFill>
-                  <a:srgbClr val="ffffff"/>
-                </a:solidFill>
-                <a:latin typeface="Arial"/>
-                <a:ea typeface="Arial"/>
-              </a:rPr>
-              <a:t>→</a:t>
-            </a:r>
-            <a:endParaRPr b="0" lang="en-US" sz="2000" spc="-1" strike="noStrike">
-              <a:latin typeface="Arial"/>
-            </a:endParaRPr>
-          </a:p>
-        </p:txBody>
-      </p:sp>
-      <p:sp>
-        <p:nvSpPr>
-          <p:cNvPr id="116" name="Чип_1"/>
-          <p:cNvSpPr/>
-          <p:nvPr/>
-        </p:nvSpPr>
-        <p:spPr>
-          <a:xfrm>
-            <a:off x="5677560" y="5290560"/>
-            <a:ext cx="4673880" cy="1255680"/>
+            <a:off x="6234480" y="5290560"/>
+            <a:ext cx="5313240" cy="1255680"/>
           </a:xfrm>
           <a:prstGeom prst="roundRect">
             <a:avLst>
@@ -7247,13 +7122,13 @@
       </p:sp>
       <p:sp>
         <p:nvSpPr>
-          <p:cNvPr id="117" name="SUBTITLE 2"/>
+          <p:cNvPr id="114" name="SUBTITLE 2"/>
           <p:cNvSpPr/>
           <p:nvPr/>
         </p:nvSpPr>
         <p:spPr>
           <a:xfrm>
-            <a:off x="5842080" y="5413320"/>
+            <a:off x="6399000" y="5413320"/>
             <a:ext cx="4345920" cy="465480"/>
           </a:xfrm>
           <a:prstGeom prst="rect">
@@ -7312,13 +7187,13 @@
       </p:sp>
       <p:sp>
         <p:nvSpPr>
-          <p:cNvPr id="118" name="TEXT 2"/>
+          <p:cNvPr id="115" name="TEXT 2"/>
           <p:cNvSpPr/>
           <p:nvPr/>
         </p:nvSpPr>
         <p:spPr>
           <a:xfrm>
-            <a:off x="5842080" y="5952240"/>
+            <a:off x="6399000" y="5952240"/>
             <a:ext cx="4345920" cy="502560"/>
           </a:xfrm>
           <a:prstGeom prst="rect">
@@ -7377,14 +7252,14 @@
       </p:sp>
       <p:sp>
         <p:nvSpPr>
-          <p:cNvPr id="119" name="Чип_1"/>
+          <p:cNvPr id="116" name="Чип_1"/>
           <p:cNvSpPr/>
           <p:nvPr/>
         </p:nvSpPr>
         <p:spPr>
           <a:xfrm>
-            <a:off x="474480" y="4143240"/>
-            <a:ext cx="9876960" cy="977040"/>
+            <a:off x="639360" y="4143240"/>
+            <a:ext cx="10908360" cy="977040"/>
           </a:xfrm>
           <a:prstGeom prst="roundRect">
             <a:avLst>
@@ -7412,13 +7287,13 @@
       </p:sp>
       <p:sp>
         <p:nvSpPr>
-          <p:cNvPr id="120" name="SUBTITLE 2"/>
+          <p:cNvPr id="117" name="SUBTITLE 2"/>
           <p:cNvSpPr/>
           <p:nvPr/>
         </p:nvSpPr>
         <p:spPr>
           <a:xfrm>
-            <a:off x="639360" y="4143240"/>
+            <a:off x="803880" y="4143240"/>
             <a:ext cx="9549000" cy="309600"/>
           </a:xfrm>
           <a:prstGeom prst="rect">
@@ -7477,13 +7352,13 @@
       </p:sp>
       <p:sp>
         <p:nvSpPr>
-          <p:cNvPr id="121" name="TEXT 2"/>
+          <p:cNvPr id="118" name="TEXT 2"/>
           <p:cNvSpPr/>
           <p:nvPr/>
         </p:nvSpPr>
         <p:spPr>
           <a:xfrm>
-            <a:off x="639360" y="4526280"/>
+            <a:off x="803880" y="4526280"/>
             <a:ext cx="9549000" cy="502560"/>
           </a:xfrm>
           <a:prstGeom prst="rect">
@@ -7542,7 +7417,7 @@
       </p:sp>
       <p:sp>
         <p:nvSpPr>
-          <p:cNvPr id="122" name="TITLE"/>
+          <p:cNvPr id="119" name="TITLE"/>
           <p:cNvSpPr/>
           <p:nvPr/>
         </p:nvSpPr>
@@ -7590,6 +7465,66 @@
               <a:t>TITLE</a:t>
             </a:r>
             <a:endParaRPr b="0" lang="en-US" sz="3200" spc="-1" strike="noStrike">
+              <a:latin typeface="Arial"/>
+            </a:endParaRPr>
+          </a:p>
+        </p:txBody>
+      </p:sp>
+      <p:sp>
+        <p:nvSpPr>
+          <p:cNvPr id="120" name="PIC 1"/>
+          <p:cNvSpPr/>
+          <p:nvPr/>
+        </p:nvSpPr>
+        <p:spPr>
+          <a:xfrm>
+            <a:off x="638280" y="1410840"/>
+            <a:ext cx="10908360" cy="2447640"/>
+          </a:xfrm>
+          <a:prstGeom prst="roundRect">
+            <a:avLst>
+              <a:gd name="adj" fmla="val 4706"/>
+            </a:avLst>
+          </a:prstGeom>
+          <a:solidFill>
+            <a:schemeClr val="bg1">
+              <a:lumMod val="85000"/>
+            </a:schemeClr>
+          </a:solidFill>
+          <a:ln w="9525">
+            <a:solidFill>
+              <a:srgbClr val="6e6e6e"/>
+            </a:solidFill>
+            <a:round/>
+          </a:ln>
+        </p:spPr>
+        <p:style>
+          <a:lnRef idx="0"/>
+          <a:fillRef idx="0"/>
+          <a:effectRef idx="0"/>
+          <a:fontRef idx="minor"/>
+        </p:style>
+        <p:txBody>
+          <a:bodyPr lIns="90000" rIns="90000" tIns="45000" bIns="45000" anchor="ctr">
+            <a:noAutofit/>
+          </a:bodyPr>
+          <a:p>
+            <a:pPr algn="ctr">
+              <a:lnSpc>
+                <a:spcPct val="100000"/>
+              </a:lnSpc>
+              <a:buNone/>
+            </a:pPr>
+            <a:r>
+              <a:rPr b="0" lang="en-US" sz="1800" spc="-1" strike="noStrike">
+                <a:solidFill>
+                  <a:srgbClr val="ffffff"/>
+                </a:solidFill>
+                <a:latin typeface="Calibri"/>
+              </a:rPr>
+              <a:t>PIC</a:t>
+            </a:r>
+            <a:endParaRPr b="0" lang="en-US" sz="1800" spc="-1" strike="noStrike">
               <a:latin typeface="Arial"/>
             </a:endParaRPr>
           </a:p>
@@ -7634,7 +7569,7 @@
       </p:grpSpPr>
       <p:sp>
         <p:nvSpPr>
-          <p:cNvPr id="123" name="Блок_3"/>
+          <p:cNvPr id="121" name="Блок_3"/>
           <p:cNvSpPr/>
           <p:nvPr/>
         </p:nvSpPr>
@@ -7667,7 +7602,7 @@
       </p:sp>
       <p:sp>
         <p:nvSpPr>
-          <p:cNvPr id="124" name="Блок_1"/>
+          <p:cNvPr id="122" name="Блок_1"/>
           <p:cNvSpPr/>
           <p:nvPr/>
         </p:nvSpPr>
@@ -7700,7 +7635,7 @@
       </p:sp>
       <p:pic>
         <p:nvPicPr>
-          <p:cNvPr id="125" name="Кнопка_Навигация_Фон" descr="/home/claude/vistas/assets/grad_circle.png"/>
+          <p:cNvPr id="123" name="Кнопка_Навигация_Фон" descr="/home/claude/vistas/assets/grad_circle.png"/>
           <p:cNvPicPr/>
           <p:nvPr/>
         </p:nvPicPr>
@@ -7723,7 +7658,7 @@
       </p:pic>
       <p:sp>
         <p:nvSpPr>
-          <p:cNvPr id="126" name="SUBTITLE 1"/>
+          <p:cNvPr id="124" name="SUBTITLE 1"/>
           <p:cNvSpPr/>
           <p:nvPr/>
         </p:nvSpPr>
@@ -7778,7 +7713,7 @@
       </p:sp>
       <p:sp>
         <p:nvSpPr>
-          <p:cNvPr id="127" name="TEXT 1"/>
+          <p:cNvPr id="125" name="TEXT 1"/>
           <p:cNvSpPr/>
           <p:nvPr/>
         </p:nvSpPr>
@@ -7833,7 +7768,7 @@
       </p:sp>
       <p:sp>
         <p:nvSpPr>
-          <p:cNvPr id="128" name="Блок_2"/>
+          <p:cNvPr id="126" name="Блок_2"/>
           <p:cNvSpPr/>
           <p:nvPr/>
         </p:nvSpPr>
@@ -7866,7 +7801,7 @@
       </p:sp>
       <p:sp>
         <p:nvSpPr>
-          <p:cNvPr id="129" name="SUBTITLE 2"/>
+          <p:cNvPr id="127" name="SUBTITLE 2"/>
           <p:cNvSpPr/>
           <p:nvPr/>
         </p:nvSpPr>
@@ -7921,7 +7856,7 @@
       </p:sp>
       <p:sp>
         <p:nvSpPr>
-          <p:cNvPr id="130" name="TEXT 2"/>
+          <p:cNvPr id="128" name="TEXT 2"/>
           <p:cNvSpPr/>
           <p:nvPr/>
         </p:nvSpPr>
@@ -7976,7 +7911,7 @@
       </p:sp>
       <p:sp>
         <p:nvSpPr>
-          <p:cNvPr id="131" name="SUBTITLE 3"/>
+          <p:cNvPr id="129" name="SUBTITLE 3"/>
           <p:cNvSpPr/>
           <p:nvPr/>
         </p:nvSpPr>
@@ -8031,7 +7966,7 @@
       </p:sp>
       <p:sp>
         <p:nvSpPr>
-          <p:cNvPr id="132" name="TEXT 3"/>
+          <p:cNvPr id="130" name="TEXT 3"/>
           <p:cNvSpPr/>
           <p:nvPr/>
         </p:nvSpPr>
@@ -8086,7 +8021,7 @@
       </p:sp>
       <p:sp>
         <p:nvSpPr>
-          <p:cNvPr id="133" name="TITLE"/>
+          <p:cNvPr id="131" name="TITLE"/>
           <p:cNvSpPr/>
           <p:nvPr/>
         </p:nvSpPr>
@@ -8141,7 +8076,7 @@
       </p:sp>
       <p:sp>
         <p:nvSpPr>
-          <p:cNvPr id="134" name="Кнопка_Навигация_Стрелка"/>
+          <p:cNvPr id="132" name="Кнопка_Навигация_Стрелка"/>
           <p:cNvSpPr/>
           <p:nvPr/>
         </p:nvSpPr>
@@ -8233,7 +8168,7 @@
       </p:grpSpPr>
       <p:pic>
         <p:nvPicPr>
-          <p:cNvPr id="135" name="Градиент_Фон" descr="/home/claude/vistas/assets/grad_full_diagonal.png"/>
+          <p:cNvPr id="133" name="Градиент_Фон" descr="/home/claude/vistas/assets/grad_full_diagonal.png"/>
           <p:cNvPicPr/>
           <p:nvPr/>
         </p:nvPicPr>
@@ -8256,7 +8191,7 @@
       </p:pic>
       <p:sp>
         <p:nvSpPr>
-          <p:cNvPr id="136" name="TITLE"/>
+          <p:cNvPr id="134" name="TITLE"/>
           <p:cNvSpPr/>
           <p:nvPr/>
         </p:nvSpPr>
